--- a/pptx_sessions_8_22/第9回_応用編_受講者用.pptx
+++ b/pptx_sessions_8_22/第9回_応用編_受講者用.pptx
@@ -1527,7 +1527,9 @@
           </a:ln>
         </p:spPr>
         <p:txBody>
-          <a:bodyPr/>
+          <a:bodyPr wrap="square">
+            <a:normAutofit/>
+          </a:bodyPr>
           <a:p/>
         </p:txBody>
       </p:sp>
@@ -1556,7 +1558,9 @@
           </a:ln>
         </p:spPr>
         <p:txBody>
-          <a:bodyPr/>
+          <a:bodyPr wrap="square">
+            <a:normAutofit/>
+          </a:bodyPr>
           <a:p/>
         </p:txBody>
       </p:sp>
@@ -1578,7 +1582,9 @@
           <a:ln/>
         </p:spPr>
         <p:txBody>
-          <a:bodyPr wrap="square" rtlCol="0" anchor="ctr"/>
+          <a:bodyPr wrap="square" rtlCol="0" anchor="ctr">
+            <a:normAutofit/>
+          </a:bodyPr>
           <a:lstStyle/>
           <a:p>
             <a:pPr algn="ctr" indent="0" marL="0">
@@ -1617,7 +1623,9 @@
           <a:ln/>
         </p:spPr>
         <p:txBody>
-          <a:bodyPr wrap="square" rtlCol="0" anchor="ctr"/>
+          <a:bodyPr wrap="square" rtlCol="0" anchor="ctr">
+            <a:normAutofit/>
+          </a:bodyPr>
           <a:lstStyle/>
           <a:p>
             <a:pPr algn="ctr" indent="0" marL="0">
@@ -1656,7 +1664,9 @@
           <a:ln/>
         </p:spPr>
         <p:txBody>
-          <a:bodyPr wrap="square" rtlCol="0" anchor="ctr"/>
+          <a:bodyPr wrap="square" rtlCol="0" anchor="ctr">
+            <a:normAutofit/>
+          </a:bodyPr>
           <a:lstStyle/>
           <a:p>
             <a:pPr algn="ctr" indent="0" marL="0">
@@ -1695,7 +1705,9 @@
           <a:ln/>
         </p:spPr>
         <p:txBody>
-          <a:bodyPr wrap="square" rtlCol="0" anchor="ctr"/>
+          <a:bodyPr wrap="square" rtlCol="0" anchor="ctr">
+            <a:normAutofit/>
+          </a:bodyPr>
           <a:lstStyle/>
           <a:p>
             <a:pPr algn="ctr" indent="0" marL="0">
@@ -1743,7 +1755,9 @@
           </a:ln>
         </p:spPr>
         <p:txBody>
-          <a:bodyPr/>
+          <a:bodyPr wrap="square">
+            <a:normAutofit/>
+          </a:bodyPr>
           <a:p/>
         </p:txBody>
       </p:sp>
@@ -1765,7 +1779,9 @@
           <a:ln/>
         </p:spPr>
         <p:txBody>
-          <a:bodyPr wrap="square" rtlCol="0" anchor="ctr"/>
+          <a:bodyPr wrap="square" rtlCol="0" anchor="ctr">
+            <a:normAutofit/>
+          </a:bodyPr>
           <a:lstStyle/>
           <a:p>
             <a:pPr algn="ctr" indent="0" marL="0">
@@ -1836,7 +1852,9 @@
           </a:ln>
         </p:spPr>
         <p:txBody>
-          <a:bodyPr/>
+          <a:bodyPr wrap="square">
+            <a:normAutofit/>
+          </a:bodyPr>
           <a:p/>
         </p:txBody>
       </p:sp>
@@ -1865,7 +1883,9 @@
           </a:ln>
         </p:spPr>
         <p:txBody>
-          <a:bodyPr/>
+          <a:bodyPr wrap="square">
+            <a:normAutofit/>
+          </a:bodyPr>
           <a:p/>
         </p:txBody>
       </p:sp>
@@ -1887,7 +1907,9 @@
           <a:ln/>
         </p:spPr>
         <p:txBody>
-          <a:bodyPr wrap="square" rtlCol="0" anchor="ctr"/>
+          <a:bodyPr wrap="square" rtlCol="0" anchor="ctr">
+            <a:normAutofit/>
+          </a:bodyPr>
           <a:lstStyle/>
           <a:p>
             <a:pPr indent="0" marL="0">
@@ -1926,7 +1948,9 @@
           <a:ln/>
         </p:spPr>
         <p:txBody>
-          <a:bodyPr wrap="square" rtlCol="0" anchor="ctr"/>
+          <a:bodyPr wrap="square" rtlCol="0" anchor="ctr">
+            <a:normAutofit/>
+          </a:bodyPr>
           <a:lstStyle/>
           <a:p>
             <a:pPr indent="0" marL="0">
@@ -1974,7 +1998,9 @@
           </a:ln>
         </p:spPr>
         <p:txBody>
-          <a:bodyPr/>
+          <a:bodyPr wrap="square">
+            <a:normAutofit/>
+          </a:bodyPr>
           <a:p/>
         </p:txBody>
       </p:sp>
@@ -1996,7 +2022,9 @@
           <a:ln/>
         </p:spPr>
         <p:txBody>
-          <a:bodyPr wrap="square" rtlCol="0" anchor="ctr"/>
+          <a:bodyPr wrap="square" rtlCol="0" anchor="ctr">
+            <a:normAutofit/>
+          </a:bodyPr>
           <a:lstStyle/>
           <a:p>
             <a:pPr indent="0" marL="0">
@@ -2035,7 +2063,9 @@
           <a:ln/>
         </p:spPr>
         <p:txBody>
-          <a:bodyPr wrap="square" rtlCol="0" anchor="ctr"/>
+          <a:bodyPr wrap="square" rtlCol="0" anchor="ctr">
+            <a:normAutofit/>
+          </a:bodyPr>
           <a:lstStyle/>
           <a:p>
             <a:pPr indent="0" marL="0">
@@ -2074,7 +2104,9 @@
           <a:ln/>
         </p:spPr>
         <p:txBody>
-          <a:bodyPr wrap="square" rtlCol="0" anchor="ctr"/>
+          <a:bodyPr wrap="square" rtlCol="0" anchor="ctr">
+            <a:normAutofit/>
+          </a:bodyPr>
           <a:lstStyle/>
           <a:p>
             <a:pPr indent="0" marL="0">
@@ -2122,7 +2154,9 @@
           </a:ln>
         </p:spPr>
         <p:txBody>
-          <a:bodyPr/>
+          <a:bodyPr wrap="square">
+            <a:normAutofit/>
+          </a:bodyPr>
           <a:p/>
         </p:txBody>
       </p:sp>
@@ -2144,7 +2178,9 @@
           <a:ln/>
         </p:spPr>
         <p:txBody>
-          <a:bodyPr wrap="square" rtlCol="0" anchor="ctr"/>
+          <a:bodyPr wrap="square" rtlCol="0" anchor="ctr">
+            <a:normAutofit/>
+          </a:bodyPr>
           <a:lstStyle/>
           <a:p>
             <a:pPr indent="0" marL="0">
@@ -2183,7 +2219,9 @@
           <a:ln/>
         </p:spPr>
         <p:txBody>
-          <a:bodyPr wrap="square" rtlCol="0" anchor="ctr"/>
+          <a:bodyPr wrap="square" rtlCol="0" anchor="ctr">
+            <a:normAutofit/>
+          </a:bodyPr>
           <a:lstStyle/>
           <a:p>
             <a:pPr indent="0" marL="0">
@@ -2222,7 +2260,9 @@
           <a:ln/>
         </p:spPr>
         <p:txBody>
-          <a:bodyPr wrap="square" rtlCol="0" anchor="ctr"/>
+          <a:bodyPr wrap="square" rtlCol="0" anchor="ctr">
+            <a:normAutofit/>
+          </a:bodyPr>
           <a:lstStyle/>
           <a:p>
             <a:pPr indent="0" marL="0">
@@ -2270,7 +2310,9 @@
           </a:ln>
         </p:spPr>
         <p:txBody>
-          <a:bodyPr/>
+          <a:bodyPr wrap="square">
+            <a:normAutofit/>
+          </a:bodyPr>
           <a:p/>
         </p:txBody>
       </p:sp>
@@ -2292,7 +2334,9 @@
           <a:ln/>
         </p:spPr>
         <p:txBody>
-          <a:bodyPr wrap="square" rtlCol="0" anchor="ctr"/>
+          <a:bodyPr wrap="square" rtlCol="0" anchor="ctr">
+            <a:normAutofit/>
+          </a:bodyPr>
           <a:lstStyle/>
           <a:p>
             <a:pPr indent="0" marL="0">
@@ -2331,7 +2375,9 @@
           <a:ln/>
         </p:spPr>
         <p:txBody>
-          <a:bodyPr wrap="square" rtlCol="0" anchor="ctr"/>
+          <a:bodyPr wrap="square" rtlCol="0" anchor="ctr">
+            <a:normAutofit/>
+          </a:bodyPr>
           <a:lstStyle/>
           <a:p>
             <a:pPr indent="0" marL="0">
@@ -2370,7 +2416,9 @@
           <a:ln/>
         </p:spPr>
         <p:txBody>
-          <a:bodyPr wrap="square" rtlCol="0" anchor="ctr"/>
+          <a:bodyPr wrap="square" rtlCol="0" anchor="ctr">
+            <a:normAutofit/>
+          </a:bodyPr>
           <a:lstStyle/>
           <a:p>
             <a:pPr indent="0" marL="0">
@@ -2409,7 +2457,9 @@
           <a:ln/>
         </p:spPr>
         <p:txBody>
-          <a:bodyPr wrap="square" rtlCol="0" anchor="ctr"/>
+          <a:bodyPr wrap="square" rtlCol="0" anchor="ctr">
+            <a:normAutofit/>
+          </a:bodyPr>
           <a:lstStyle/>
           <a:p>
             <a:pPr algn="r" indent="0" marL="0">
@@ -2480,7 +2530,9 @@
           </a:ln>
         </p:spPr>
         <p:txBody>
-          <a:bodyPr/>
+          <a:bodyPr wrap="square">
+            <a:normAutofit/>
+          </a:bodyPr>
           <a:p/>
         </p:txBody>
       </p:sp>
@@ -2509,7 +2561,9 @@
           </a:ln>
         </p:spPr>
         <p:txBody>
-          <a:bodyPr/>
+          <a:bodyPr wrap="square">
+            <a:normAutofit/>
+          </a:bodyPr>
           <a:p/>
         </p:txBody>
       </p:sp>
@@ -2531,7 +2585,9 @@
           <a:ln/>
         </p:spPr>
         <p:txBody>
-          <a:bodyPr wrap="square" rtlCol="0" anchor="ctr"/>
+          <a:bodyPr wrap="square" rtlCol="0" anchor="ctr">
+            <a:normAutofit/>
+          </a:bodyPr>
           <a:lstStyle/>
           <a:p>
             <a:pPr indent="0" marL="0">
@@ -2570,7 +2626,9 @@
           <a:ln/>
         </p:spPr>
         <p:txBody>
-          <a:bodyPr wrap="square" rtlCol="0" anchor="ctr"/>
+          <a:bodyPr wrap="square" rtlCol="0" anchor="ctr">
+            <a:normAutofit/>
+          </a:bodyPr>
           <a:lstStyle/>
           <a:p>
             <a:pPr indent="0" marL="0">
@@ -2616,7 +2674,9 @@
           </a:ln>
         </p:spPr>
         <p:txBody>
-          <a:bodyPr/>
+          <a:bodyPr wrap="square">
+            <a:normAutofit/>
+          </a:bodyPr>
           <a:p/>
         </p:txBody>
       </p:sp>
@@ -2647,7 +2707,9 @@
           </a:ln>
         </p:spPr>
         <p:txBody>
-          <a:bodyPr/>
+          <a:bodyPr wrap="square">
+            <a:normAutofit/>
+          </a:bodyPr>
           <a:p/>
         </p:txBody>
       </p:sp>
@@ -2669,7 +2731,9 @@
           <a:ln/>
         </p:spPr>
         <p:txBody>
-          <a:bodyPr wrap="square" rtlCol="0" anchor="ctr"/>
+          <a:bodyPr wrap="square" rtlCol="0" anchor="ctr">
+            <a:normAutofit/>
+          </a:bodyPr>
           <a:lstStyle/>
           <a:p>
             <a:pPr algn="ctr" indent="0" marL="0">
@@ -2708,7 +2772,9 @@
           <a:ln/>
         </p:spPr>
         <p:txBody>
-          <a:bodyPr wrap="square" rtlCol="0" anchor="ctr"/>
+          <a:bodyPr wrap="square" rtlCol="0" anchor="ctr">
+            <a:normAutofit/>
+          </a:bodyPr>
           <a:lstStyle/>
           <a:p>
             <a:pPr indent="0" marL="0">
@@ -2754,7 +2820,9 @@
           </a:ln>
         </p:spPr>
         <p:txBody>
-          <a:bodyPr/>
+          <a:bodyPr wrap="square">
+            <a:normAutofit/>
+          </a:bodyPr>
           <a:p/>
         </p:txBody>
       </p:sp>
@@ -2785,7 +2853,9 @@
           </a:ln>
         </p:spPr>
         <p:txBody>
-          <a:bodyPr/>
+          <a:bodyPr wrap="square">
+            <a:normAutofit/>
+          </a:bodyPr>
           <a:p/>
         </p:txBody>
       </p:sp>
@@ -2807,7 +2877,9 @@
           <a:ln/>
         </p:spPr>
         <p:txBody>
-          <a:bodyPr wrap="square" rtlCol="0" anchor="ctr"/>
+          <a:bodyPr wrap="square" rtlCol="0" anchor="ctr">
+            <a:normAutofit/>
+          </a:bodyPr>
           <a:lstStyle/>
           <a:p>
             <a:pPr algn="ctr" indent="0" marL="0">
@@ -2846,7 +2918,9 @@
           <a:ln/>
         </p:spPr>
         <p:txBody>
-          <a:bodyPr wrap="square" rtlCol="0" anchor="ctr"/>
+          <a:bodyPr wrap="square" rtlCol="0" anchor="ctr">
+            <a:normAutofit/>
+          </a:bodyPr>
           <a:lstStyle/>
           <a:p>
             <a:pPr indent="0" marL="0">
@@ -2885,7 +2959,9 @@
           <a:ln/>
         </p:spPr>
         <p:txBody>
-          <a:bodyPr wrap="square" rtlCol="0" anchor="ctr"/>
+          <a:bodyPr wrap="square" rtlCol="0" anchor="ctr">
+            <a:normAutofit/>
+          </a:bodyPr>
           <a:lstStyle/>
           <a:p>
             <a:pPr indent="0" marL="0">
@@ -2933,7 +3009,9 @@
           </a:ln>
         </p:spPr>
         <p:txBody>
-          <a:bodyPr/>
+          <a:bodyPr wrap="square">
+            <a:normAutofit/>
+          </a:bodyPr>
           <a:p/>
         </p:txBody>
       </p:sp>
@@ -2964,7 +3042,9 @@
           </a:ln>
         </p:spPr>
         <p:txBody>
-          <a:bodyPr/>
+          <a:bodyPr wrap="square">
+            <a:normAutofit/>
+          </a:bodyPr>
           <a:p/>
         </p:txBody>
       </p:sp>
@@ -2986,7 +3066,9 @@
           <a:ln/>
         </p:spPr>
         <p:txBody>
-          <a:bodyPr wrap="square" rtlCol="0" anchor="ctr"/>
+          <a:bodyPr wrap="square" rtlCol="0" anchor="ctr">
+            <a:normAutofit/>
+          </a:bodyPr>
           <a:lstStyle/>
           <a:p>
             <a:pPr algn="ctr" indent="0" marL="0">
@@ -3025,7 +3107,9 @@
           <a:ln/>
         </p:spPr>
         <p:txBody>
-          <a:bodyPr wrap="square" rtlCol="0" anchor="ctr"/>
+          <a:bodyPr wrap="square" rtlCol="0" anchor="ctr">
+            <a:normAutofit/>
+          </a:bodyPr>
           <a:lstStyle/>
           <a:p>
             <a:pPr indent="0" marL="0">
@@ -3073,7 +3157,9 @@
           </a:ln>
         </p:spPr>
         <p:txBody>
-          <a:bodyPr/>
+          <a:bodyPr wrap="square">
+            <a:normAutofit/>
+          </a:bodyPr>
           <a:p/>
         </p:txBody>
       </p:sp>
@@ -3104,7 +3190,9 @@
           </a:ln>
         </p:spPr>
         <p:txBody>
-          <a:bodyPr/>
+          <a:bodyPr wrap="square">
+            <a:normAutofit/>
+          </a:bodyPr>
           <a:p/>
         </p:txBody>
       </p:sp>
@@ -3126,7 +3214,9 @@
           <a:ln/>
         </p:spPr>
         <p:txBody>
-          <a:bodyPr wrap="square" rtlCol="0" anchor="ctr"/>
+          <a:bodyPr wrap="square" rtlCol="0" anchor="ctr">
+            <a:normAutofit/>
+          </a:bodyPr>
           <a:lstStyle/>
           <a:p>
             <a:pPr algn="ctr" indent="0" marL="0">
@@ -3165,7 +3255,9 @@
           <a:ln/>
         </p:spPr>
         <p:txBody>
-          <a:bodyPr wrap="square" rtlCol="0" anchor="ctr"/>
+          <a:bodyPr wrap="square" rtlCol="0" anchor="ctr">
+            <a:normAutofit/>
+          </a:bodyPr>
           <a:lstStyle/>
           <a:p>
             <a:pPr indent="0" marL="0">
@@ -3213,7 +3305,9 @@
           </a:ln>
         </p:spPr>
         <p:txBody>
-          <a:bodyPr/>
+          <a:bodyPr wrap="square">
+            <a:normAutofit/>
+          </a:bodyPr>
           <a:p/>
         </p:txBody>
       </p:sp>
@@ -3244,7 +3338,9 @@
           </a:ln>
         </p:spPr>
         <p:txBody>
-          <a:bodyPr/>
+          <a:bodyPr wrap="square">
+            <a:normAutofit/>
+          </a:bodyPr>
           <a:p/>
         </p:txBody>
       </p:sp>
@@ -3266,7 +3362,9 @@
           <a:ln/>
         </p:spPr>
         <p:txBody>
-          <a:bodyPr wrap="square" rtlCol="0" anchor="ctr"/>
+          <a:bodyPr wrap="square" rtlCol="0" anchor="ctr">
+            <a:normAutofit/>
+          </a:bodyPr>
           <a:lstStyle/>
           <a:p>
             <a:pPr algn="ctr" indent="0" marL="0">
@@ -3305,7 +3403,9 @@
           <a:ln/>
         </p:spPr>
         <p:txBody>
-          <a:bodyPr wrap="square" rtlCol="0" anchor="ctr"/>
+          <a:bodyPr wrap="square" rtlCol="0" anchor="ctr">
+            <a:normAutofit/>
+          </a:bodyPr>
           <a:lstStyle/>
           <a:p>
             <a:pPr indent="0" marL="0">
@@ -3353,7 +3453,9 @@
           </a:ln>
         </p:spPr>
         <p:txBody>
-          <a:bodyPr/>
+          <a:bodyPr wrap="square">
+            <a:normAutofit/>
+          </a:bodyPr>
           <a:p/>
         </p:txBody>
       </p:sp>
@@ -3384,7 +3486,9 @@
           </a:ln>
         </p:spPr>
         <p:txBody>
-          <a:bodyPr/>
+          <a:bodyPr wrap="square">
+            <a:normAutofit/>
+          </a:bodyPr>
           <a:p/>
         </p:txBody>
       </p:sp>
@@ -3406,7 +3510,9 @@
           <a:ln/>
         </p:spPr>
         <p:txBody>
-          <a:bodyPr wrap="square" rtlCol="0" anchor="ctr"/>
+          <a:bodyPr wrap="square" rtlCol="0" anchor="ctr">
+            <a:normAutofit/>
+          </a:bodyPr>
           <a:lstStyle/>
           <a:p>
             <a:pPr algn="ctr" indent="0" marL="0">
@@ -3445,7 +3551,9 @@
           <a:ln/>
         </p:spPr>
         <p:txBody>
-          <a:bodyPr wrap="square" rtlCol="0" anchor="ctr"/>
+          <a:bodyPr wrap="square" rtlCol="0" anchor="ctr">
+            <a:normAutofit/>
+          </a:bodyPr>
           <a:lstStyle/>
           <a:p>
             <a:pPr indent="0" marL="0">
@@ -3484,7 +3592,9 @@
           <a:ln/>
         </p:spPr>
         <p:txBody>
-          <a:bodyPr wrap="square" rtlCol="0" anchor="ctr"/>
+          <a:bodyPr wrap="square" rtlCol="0" anchor="ctr">
+            <a:normAutofit/>
+          </a:bodyPr>
           <a:lstStyle/>
           <a:p>
             <a:pPr algn="r" indent="0" marL="0">
@@ -3555,7 +3665,9 @@
           </a:ln>
         </p:spPr>
         <p:txBody>
-          <a:bodyPr/>
+          <a:bodyPr wrap="square">
+            <a:normAutofit/>
+          </a:bodyPr>
           <a:p/>
         </p:txBody>
       </p:sp>
@@ -3584,7 +3696,9 @@
           </a:ln>
         </p:spPr>
         <p:txBody>
-          <a:bodyPr/>
+          <a:bodyPr wrap="square">
+            <a:normAutofit/>
+          </a:bodyPr>
           <a:p/>
         </p:txBody>
       </p:sp>
@@ -3615,7 +3729,9 @@
           </a:ln>
         </p:spPr>
         <p:txBody>
-          <a:bodyPr/>
+          <a:bodyPr wrap="square">
+            <a:normAutofit/>
+          </a:bodyPr>
           <a:p/>
         </p:txBody>
       </p:sp>
@@ -3637,7 +3753,9 @@
           <a:ln/>
         </p:spPr>
         <p:txBody>
-          <a:bodyPr wrap="square" rtlCol="0" anchor="ctr"/>
+          <a:bodyPr wrap="square" rtlCol="0" anchor="ctr">
+            <a:normAutofit/>
+          </a:bodyPr>
           <a:lstStyle/>
           <a:p>
             <a:pPr algn="ctr" indent="0" marL="0">
@@ -3676,7 +3794,9 @@
           <a:ln/>
         </p:spPr>
         <p:txBody>
-          <a:bodyPr wrap="square" rtlCol="0" anchor="ctr"/>
+          <a:bodyPr wrap="square" rtlCol="0" anchor="ctr">
+            <a:normAutofit/>
+          </a:bodyPr>
           <a:lstStyle/>
           <a:p>
             <a:pPr indent="0" marL="0">
@@ -3715,7 +3835,9 @@
           <a:ln/>
         </p:spPr>
         <p:txBody>
-          <a:bodyPr wrap="square" rtlCol="0" anchor="ctr"/>
+          <a:bodyPr wrap="square" rtlCol="0" anchor="ctr">
+            <a:normAutofit/>
+          </a:bodyPr>
           <a:lstStyle/>
           <a:p>
             <a:pPr indent="0" marL="0">
@@ -3763,7 +3885,9 @@
           </a:ln>
         </p:spPr>
         <p:txBody>
-          <a:bodyPr/>
+          <a:bodyPr wrap="square">
+            <a:normAutofit/>
+          </a:bodyPr>
           <a:p/>
         </p:txBody>
       </p:sp>
@@ -3785,7 +3909,9 @@
           <a:ln/>
         </p:spPr>
         <p:txBody>
-          <a:bodyPr wrap="square" rtlCol="0" anchor="ctr"/>
+          <a:bodyPr wrap="square" rtlCol="0" anchor="ctr">
+            <a:normAutofit/>
+          </a:bodyPr>
           <a:lstStyle/>
           <a:p>
             <a:pPr indent="0" marL="0">
@@ -3824,7 +3950,9 @@
           <a:ln/>
         </p:spPr>
         <p:txBody>
-          <a:bodyPr wrap="square" rtlCol="0" anchor="t"/>
+          <a:bodyPr wrap="square" rtlCol="0" anchor="t">
+            <a:normAutofit/>
+          </a:bodyPr>
           <a:lstStyle/>
           <a:p>
             <a:pPr indent="0" marL="0">
@@ -4008,7 +4136,9 @@
           </a:ln>
         </p:spPr>
         <p:txBody>
-          <a:bodyPr/>
+          <a:bodyPr wrap="square">
+            <a:normAutofit/>
+          </a:bodyPr>
           <a:p/>
         </p:txBody>
       </p:sp>
@@ -4030,7 +4160,9 @@
           <a:ln/>
         </p:spPr>
         <p:txBody>
-          <a:bodyPr wrap="square" rtlCol="0" anchor="ctr"/>
+          <a:bodyPr wrap="square" rtlCol="0" anchor="ctr">
+            <a:normAutofit/>
+          </a:bodyPr>
           <a:lstStyle/>
           <a:p>
             <a:pPr indent="0" marL="0">
@@ -4069,7 +4201,9 @@
           <a:ln/>
         </p:spPr>
         <p:txBody>
-          <a:bodyPr wrap="square" rtlCol="0" anchor="t"/>
+          <a:bodyPr wrap="square" rtlCol="0" anchor="t">
+            <a:normAutofit/>
+          </a:bodyPr>
           <a:lstStyle/>
           <a:p>
             <a:pPr indent="0" marL="0">
@@ -4244,7 +4378,9 @@
           <a:ln/>
         </p:spPr>
         <p:txBody>
-          <a:bodyPr wrap="square" rtlCol="0" anchor="ctr"/>
+          <a:bodyPr wrap="square" rtlCol="0" anchor="ctr">
+            <a:normAutofit/>
+          </a:bodyPr>
           <a:lstStyle/>
           <a:p>
             <a:pPr algn="r" indent="0" marL="0">
@@ -4315,7 +4451,9 @@
           </a:ln>
         </p:spPr>
         <p:txBody>
-          <a:bodyPr/>
+          <a:bodyPr wrap="square">
+            <a:normAutofit/>
+          </a:bodyPr>
           <a:p/>
         </p:txBody>
       </p:sp>
@@ -4344,7 +4482,9 @@
           </a:ln>
         </p:spPr>
         <p:txBody>
-          <a:bodyPr/>
+          <a:bodyPr wrap="square">
+            <a:normAutofit/>
+          </a:bodyPr>
           <a:p/>
         </p:txBody>
       </p:sp>
@@ -4375,7 +4515,9 @@
           </a:ln>
         </p:spPr>
         <p:txBody>
-          <a:bodyPr/>
+          <a:bodyPr wrap="square">
+            <a:normAutofit/>
+          </a:bodyPr>
           <a:p/>
         </p:txBody>
       </p:sp>
@@ -4397,7 +4539,9 @@
           <a:ln/>
         </p:spPr>
         <p:txBody>
-          <a:bodyPr wrap="square" rtlCol="0" anchor="ctr"/>
+          <a:bodyPr wrap="square" rtlCol="0" anchor="ctr">
+            <a:normAutofit/>
+          </a:bodyPr>
           <a:lstStyle/>
           <a:p>
             <a:pPr algn="ctr" indent="0" marL="0">
@@ -4436,7 +4580,9 @@
           <a:ln/>
         </p:spPr>
         <p:txBody>
-          <a:bodyPr wrap="square" rtlCol="0" anchor="ctr"/>
+          <a:bodyPr wrap="square" rtlCol="0" anchor="ctr">
+            <a:normAutofit/>
+          </a:bodyPr>
           <a:lstStyle/>
           <a:p>
             <a:pPr indent="0" marL="0">
@@ -4475,7 +4621,9 @@
           <a:ln/>
         </p:spPr>
         <p:txBody>
-          <a:bodyPr wrap="square" rtlCol="0" anchor="ctr"/>
+          <a:bodyPr wrap="square" rtlCol="0" anchor="ctr">
+            <a:normAutofit/>
+          </a:bodyPr>
           <a:lstStyle/>
           <a:p>
             <a:pPr indent="0" marL="0">
@@ -4523,7 +4671,9 @@
           </a:ln>
         </p:spPr>
         <p:txBody>
-          <a:bodyPr/>
+          <a:bodyPr wrap="square">
+            <a:normAutofit/>
+          </a:bodyPr>
           <a:p/>
         </p:txBody>
       </p:sp>
@@ -4545,7 +4695,9 @@
           <a:ln/>
         </p:spPr>
         <p:txBody>
-          <a:bodyPr wrap="square" rtlCol="0" anchor="ctr"/>
+          <a:bodyPr wrap="square" rtlCol="0" anchor="ctr">
+            <a:normAutofit/>
+          </a:bodyPr>
           <a:lstStyle/>
           <a:p>
             <a:pPr indent="0" marL="0">
@@ -4584,7 +4736,9 @@
           <a:ln/>
         </p:spPr>
         <p:txBody>
-          <a:bodyPr wrap="square" rtlCol="0" anchor="ctr"/>
+          <a:bodyPr wrap="square" rtlCol="0" anchor="ctr">
+            <a:normAutofit/>
+          </a:bodyPr>
           <a:lstStyle/>
           <a:p>
             <a:pPr indent="0" marL="0">
@@ -4623,7 +4777,9 @@
           <a:ln/>
         </p:spPr>
         <p:txBody>
-          <a:bodyPr wrap="square" rtlCol="0" anchor="t"/>
+          <a:bodyPr wrap="square" rtlCol="0" anchor="t">
+            <a:normAutofit/>
+          </a:bodyPr>
           <a:lstStyle/>
           <a:p>
             <a:pPr indent="0" marL="0">
@@ -4662,7 +4818,9 @@
           <a:ln/>
         </p:spPr>
         <p:txBody>
-          <a:bodyPr wrap="square" rtlCol="0" anchor="ctr"/>
+          <a:bodyPr wrap="square" rtlCol="0" anchor="ctr">
+            <a:normAutofit/>
+          </a:bodyPr>
           <a:lstStyle/>
           <a:p>
             <a:pPr indent="0" marL="0">
@@ -4701,7 +4859,9 @@
           <a:ln/>
         </p:spPr>
         <p:txBody>
-          <a:bodyPr wrap="square" rtlCol="0" anchor="t"/>
+          <a:bodyPr wrap="square" rtlCol="0" anchor="t">
+            <a:normAutofit/>
+          </a:bodyPr>
           <a:lstStyle/>
           <a:p>
             <a:pPr indent="0" marL="0">
@@ -4740,7 +4900,9 @@
           <a:ln/>
         </p:spPr>
         <p:txBody>
-          <a:bodyPr wrap="square" rtlCol="0" anchor="ctr"/>
+          <a:bodyPr wrap="square" rtlCol="0" anchor="ctr">
+            <a:normAutofit/>
+          </a:bodyPr>
           <a:lstStyle/>
           <a:p>
             <a:pPr indent="0" marL="0">
@@ -4779,7 +4941,9 @@
           <a:ln/>
         </p:spPr>
         <p:txBody>
-          <a:bodyPr wrap="square" rtlCol="0" anchor="t"/>
+          <a:bodyPr wrap="square" rtlCol="0" anchor="t">
+            <a:normAutofit/>
+          </a:bodyPr>
           <a:lstStyle/>
           <a:p>
             <a:pPr indent="0" marL="0">
@@ -4827,7 +4991,9 @@
           </a:ln>
         </p:spPr>
         <p:txBody>
-          <a:bodyPr/>
+          <a:bodyPr wrap="square">
+            <a:normAutofit/>
+          </a:bodyPr>
           <a:p/>
         </p:txBody>
       </p:sp>
@@ -4849,7 +5015,9 @@
           <a:ln/>
         </p:spPr>
         <p:txBody>
-          <a:bodyPr wrap="square" rtlCol="0" anchor="ctr"/>
+          <a:bodyPr wrap="square" rtlCol="0" anchor="ctr">
+            <a:normAutofit/>
+          </a:bodyPr>
           <a:lstStyle/>
           <a:p>
             <a:pPr indent="0" marL="0">
@@ -4888,7 +5056,9 @@
           <a:ln/>
         </p:spPr>
         <p:txBody>
-          <a:bodyPr wrap="square" rtlCol="0" anchor="t"/>
+          <a:bodyPr wrap="square" rtlCol="0" anchor="t">
+            <a:normAutofit/>
+          </a:bodyPr>
           <a:lstStyle/>
           <a:p>
             <a:pPr indent="0" marL="0">
@@ -4927,7 +5097,9 @@
           <a:ln/>
         </p:spPr>
         <p:txBody>
-          <a:bodyPr wrap="square" rtlCol="0" anchor="t"/>
+          <a:bodyPr wrap="square" rtlCol="0" anchor="t">
+            <a:normAutofit/>
+          </a:bodyPr>
           <a:lstStyle/>
           <a:p>
             <a:pPr indent="0" marL="0">
@@ -4966,7 +5138,9 @@
           <a:ln/>
         </p:spPr>
         <p:txBody>
-          <a:bodyPr wrap="square" rtlCol="0" anchor="t"/>
+          <a:bodyPr wrap="square" rtlCol="0" anchor="t">
+            <a:normAutofit/>
+          </a:bodyPr>
           <a:lstStyle/>
           <a:p>
             <a:pPr indent="0" marL="0">
@@ -5005,7 +5179,9 @@
           <a:ln/>
         </p:spPr>
         <p:txBody>
-          <a:bodyPr wrap="square" rtlCol="0" anchor="ctr"/>
+          <a:bodyPr wrap="square" rtlCol="0" anchor="ctr">
+            <a:normAutofit/>
+          </a:bodyPr>
           <a:lstStyle/>
           <a:p>
             <a:pPr algn="r" indent="0" marL="0">
@@ -5076,7 +5252,9 @@
           </a:ln>
         </p:spPr>
         <p:txBody>
-          <a:bodyPr/>
+          <a:bodyPr wrap="square">
+            <a:normAutofit/>
+          </a:bodyPr>
           <a:p/>
         </p:txBody>
       </p:sp>
@@ -5105,7 +5283,9 @@
           </a:ln>
         </p:spPr>
         <p:txBody>
-          <a:bodyPr/>
+          <a:bodyPr wrap="square">
+            <a:normAutofit/>
+          </a:bodyPr>
           <a:p/>
         </p:txBody>
       </p:sp>
@@ -5136,7 +5316,9 @@
           </a:ln>
         </p:spPr>
         <p:txBody>
-          <a:bodyPr/>
+          <a:bodyPr wrap="square">
+            <a:normAutofit/>
+          </a:bodyPr>
           <a:p/>
         </p:txBody>
       </p:sp>
@@ -5158,7 +5340,9 @@
           <a:ln/>
         </p:spPr>
         <p:txBody>
-          <a:bodyPr wrap="square" rtlCol="0" anchor="ctr"/>
+          <a:bodyPr wrap="square" rtlCol="0" anchor="ctr">
+            <a:normAutofit/>
+          </a:bodyPr>
           <a:lstStyle/>
           <a:p>
             <a:pPr algn="ctr" indent="0" marL="0">
@@ -5197,7 +5381,9 @@
           <a:ln/>
         </p:spPr>
         <p:txBody>
-          <a:bodyPr wrap="square" rtlCol="0" anchor="ctr"/>
+          <a:bodyPr wrap="square" rtlCol="0" anchor="ctr">
+            <a:normAutofit/>
+          </a:bodyPr>
           <a:lstStyle/>
           <a:p>
             <a:pPr indent="0" marL="0">
@@ -5236,7 +5422,9 @@
           <a:ln/>
         </p:spPr>
         <p:txBody>
-          <a:bodyPr wrap="square" rtlCol="0" anchor="ctr"/>
+          <a:bodyPr wrap="square" rtlCol="0" anchor="ctr">
+            <a:normAutofit/>
+          </a:bodyPr>
           <a:lstStyle/>
           <a:p>
             <a:pPr indent="0" marL="0">
@@ -5284,7 +5472,9 @@
           </a:ln>
         </p:spPr>
         <p:txBody>
-          <a:bodyPr/>
+          <a:bodyPr wrap="square">
+            <a:normAutofit/>
+          </a:bodyPr>
           <a:p/>
         </p:txBody>
       </p:sp>
@@ -5306,7 +5496,9 @@
           <a:ln/>
         </p:spPr>
         <p:txBody>
-          <a:bodyPr wrap="square" rtlCol="0" anchor="ctr"/>
+          <a:bodyPr wrap="square" rtlCol="0" anchor="ctr">
+            <a:normAutofit/>
+          </a:bodyPr>
           <a:lstStyle/>
           <a:p>
             <a:pPr indent="0" marL="0">
@@ -5345,7 +5537,9 @@
           <a:ln/>
         </p:spPr>
         <p:txBody>
-          <a:bodyPr wrap="square" rtlCol="0" anchor="ctr"/>
+          <a:bodyPr wrap="square" rtlCol="0" anchor="ctr">
+            <a:normAutofit/>
+          </a:bodyPr>
           <a:lstStyle/>
           <a:p>
             <a:pPr indent="0" marL="0">
@@ -5384,7 +5578,9 @@
           <a:ln/>
         </p:spPr>
         <p:txBody>
-          <a:bodyPr wrap="square" rtlCol="0" anchor="t"/>
+          <a:bodyPr wrap="square" rtlCol="0" anchor="t">
+            <a:normAutofit/>
+          </a:bodyPr>
           <a:lstStyle/>
           <a:p>
             <a:pPr indent="0" marL="0">
@@ -5423,7 +5619,9 @@
           <a:ln/>
         </p:spPr>
         <p:txBody>
-          <a:bodyPr wrap="square" rtlCol="0" anchor="ctr"/>
+          <a:bodyPr wrap="square" rtlCol="0" anchor="ctr">
+            <a:normAutofit/>
+          </a:bodyPr>
           <a:lstStyle/>
           <a:p>
             <a:pPr indent="0" marL="0">
@@ -5462,7 +5660,9 @@
           <a:ln/>
         </p:spPr>
         <p:txBody>
-          <a:bodyPr wrap="square" rtlCol="0" anchor="t"/>
+          <a:bodyPr wrap="square" rtlCol="0" anchor="t">
+            <a:normAutofit/>
+          </a:bodyPr>
           <a:lstStyle/>
           <a:p>
             <a:pPr indent="0" marL="0">
@@ -5501,7 +5701,9 @@
           <a:ln/>
         </p:spPr>
         <p:txBody>
-          <a:bodyPr wrap="square" rtlCol="0" anchor="ctr"/>
+          <a:bodyPr wrap="square" rtlCol="0" anchor="ctr">
+            <a:normAutofit/>
+          </a:bodyPr>
           <a:lstStyle/>
           <a:p>
             <a:pPr indent="0" marL="0">
@@ -5540,7 +5742,9 @@
           <a:ln/>
         </p:spPr>
         <p:txBody>
-          <a:bodyPr wrap="square" rtlCol="0" anchor="t"/>
+          <a:bodyPr wrap="square" rtlCol="0" anchor="t">
+            <a:normAutofit/>
+          </a:bodyPr>
           <a:lstStyle/>
           <a:p>
             <a:pPr indent="0" marL="0">
@@ -5588,7 +5792,9 @@
           </a:ln>
         </p:spPr>
         <p:txBody>
-          <a:bodyPr/>
+          <a:bodyPr wrap="square">
+            <a:normAutofit/>
+          </a:bodyPr>
           <a:p/>
         </p:txBody>
       </p:sp>
@@ -5610,7 +5816,9 @@
           <a:ln/>
         </p:spPr>
         <p:txBody>
-          <a:bodyPr wrap="square" rtlCol="0" anchor="ctr"/>
+          <a:bodyPr wrap="square" rtlCol="0" anchor="ctr">
+            <a:normAutofit/>
+          </a:bodyPr>
           <a:lstStyle/>
           <a:p>
             <a:pPr indent="0" marL="0">
@@ -5649,7 +5857,9 @@
           <a:ln/>
         </p:spPr>
         <p:txBody>
-          <a:bodyPr wrap="square" rtlCol="0" anchor="t"/>
+          <a:bodyPr wrap="square" rtlCol="0" anchor="t">
+            <a:normAutofit/>
+          </a:bodyPr>
           <a:lstStyle/>
           <a:p>
             <a:pPr indent="0" marL="0">
@@ -5688,7 +5898,9 @@
           <a:ln/>
         </p:spPr>
         <p:txBody>
-          <a:bodyPr wrap="square" rtlCol="0" anchor="t"/>
+          <a:bodyPr wrap="square" rtlCol="0" anchor="t">
+            <a:normAutofit/>
+          </a:bodyPr>
           <a:lstStyle/>
           <a:p>
             <a:pPr indent="0" marL="0">
@@ -5727,7 +5939,9 @@
           <a:ln/>
         </p:spPr>
         <p:txBody>
-          <a:bodyPr wrap="square" rtlCol="0" anchor="t"/>
+          <a:bodyPr wrap="square" rtlCol="0" anchor="t">
+            <a:normAutofit/>
+          </a:bodyPr>
           <a:lstStyle/>
           <a:p>
             <a:pPr indent="0" marL="0">
@@ -5766,7 +5980,9 @@
           <a:ln/>
         </p:spPr>
         <p:txBody>
-          <a:bodyPr wrap="square" rtlCol="0" anchor="ctr"/>
+          <a:bodyPr wrap="square" rtlCol="0" anchor="ctr">
+            <a:normAutofit/>
+          </a:bodyPr>
           <a:lstStyle/>
           <a:p>
             <a:pPr algn="r" indent="0" marL="0">
@@ -5837,7 +6053,9 @@
           </a:ln>
         </p:spPr>
         <p:txBody>
-          <a:bodyPr/>
+          <a:bodyPr wrap="square">
+            <a:normAutofit/>
+          </a:bodyPr>
           <a:p/>
         </p:txBody>
       </p:sp>
@@ -5866,7 +6084,9 @@
           </a:ln>
         </p:spPr>
         <p:txBody>
-          <a:bodyPr/>
+          <a:bodyPr wrap="square">
+            <a:normAutofit/>
+          </a:bodyPr>
           <a:p/>
         </p:txBody>
       </p:sp>
@@ -5897,7 +6117,9 @@
           </a:ln>
         </p:spPr>
         <p:txBody>
-          <a:bodyPr/>
+          <a:bodyPr wrap="square">
+            <a:normAutofit/>
+          </a:bodyPr>
           <a:p/>
         </p:txBody>
       </p:sp>
@@ -5919,7 +6141,9 @@
           <a:ln/>
         </p:spPr>
         <p:txBody>
-          <a:bodyPr wrap="square" rtlCol="0" anchor="ctr"/>
+          <a:bodyPr wrap="square" rtlCol="0" anchor="ctr">
+            <a:normAutofit/>
+          </a:bodyPr>
           <a:lstStyle/>
           <a:p>
             <a:pPr algn="ctr" indent="0" marL="0">
@@ -5958,7 +6182,9 @@
           <a:ln/>
         </p:spPr>
         <p:txBody>
-          <a:bodyPr wrap="square" rtlCol="0" anchor="ctr"/>
+          <a:bodyPr wrap="square" rtlCol="0" anchor="ctr">
+            <a:normAutofit/>
+          </a:bodyPr>
           <a:lstStyle/>
           <a:p>
             <a:pPr indent="0" marL="0">
@@ -5997,7 +6223,9 @@
           <a:ln/>
         </p:spPr>
         <p:txBody>
-          <a:bodyPr wrap="square" rtlCol="0" anchor="ctr"/>
+          <a:bodyPr wrap="square" rtlCol="0" anchor="ctr">
+            <a:normAutofit/>
+          </a:bodyPr>
           <a:lstStyle/>
           <a:p>
             <a:pPr indent="0" marL="0">
@@ -6045,7 +6273,9 @@
           </a:ln>
         </p:spPr>
         <p:txBody>
-          <a:bodyPr/>
+          <a:bodyPr wrap="square">
+            <a:normAutofit/>
+          </a:bodyPr>
           <a:p/>
         </p:txBody>
       </p:sp>
@@ -6067,7 +6297,9 @@
           <a:ln/>
         </p:spPr>
         <p:txBody>
-          <a:bodyPr wrap="square" rtlCol="0" anchor="ctr"/>
+          <a:bodyPr wrap="square" rtlCol="0" anchor="ctr">
+            <a:normAutofit/>
+          </a:bodyPr>
           <a:lstStyle/>
           <a:p>
             <a:pPr indent="0" marL="0">
@@ -6106,7 +6338,9 @@
           <a:ln/>
         </p:spPr>
         <p:txBody>
-          <a:bodyPr wrap="square" rtlCol="0" anchor="ctr"/>
+          <a:bodyPr wrap="square" rtlCol="0" anchor="ctr">
+            <a:normAutofit/>
+          </a:bodyPr>
           <a:lstStyle/>
           <a:p>
             <a:pPr indent="0" marL="0">
@@ -6145,7 +6379,9 @@
           <a:ln/>
         </p:spPr>
         <p:txBody>
-          <a:bodyPr wrap="square" rtlCol="0" anchor="t"/>
+          <a:bodyPr wrap="square" rtlCol="0" anchor="t">
+            <a:normAutofit/>
+          </a:bodyPr>
           <a:lstStyle/>
           <a:p>
             <a:pPr indent="0" marL="0">
@@ -6184,7 +6420,9 @@
           <a:ln/>
         </p:spPr>
         <p:txBody>
-          <a:bodyPr wrap="square" rtlCol="0" anchor="ctr"/>
+          <a:bodyPr wrap="square" rtlCol="0" anchor="ctr">
+            <a:normAutofit/>
+          </a:bodyPr>
           <a:lstStyle/>
           <a:p>
             <a:pPr indent="0" marL="0">
@@ -6223,7 +6461,9 @@
           <a:ln/>
         </p:spPr>
         <p:txBody>
-          <a:bodyPr wrap="square" rtlCol="0" anchor="t"/>
+          <a:bodyPr wrap="square" rtlCol="0" anchor="t">
+            <a:normAutofit/>
+          </a:bodyPr>
           <a:lstStyle/>
           <a:p>
             <a:pPr indent="0" marL="0">
@@ -6262,7 +6502,9 @@
           <a:ln/>
         </p:spPr>
         <p:txBody>
-          <a:bodyPr wrap="square" rtlCol="0" anchor="ctr"/>
+          <a:bodyPr wrap="square" rtlCol="0" anchor="ctr">
+            <a:normAutofit/>
+          </a:bodyPr>
           <a:lstStyle/>
           <a:p>
             <a:pPr indent="0" marL="0">
@@ -6301,7 +6543,9 @@
           <a:ln/>
         </p:spPr>
         <p:txBody>
-          <a:bodyPr wrap="square" rtlCol="0" anchor="t"/>
+          <a:bodyPr wrap="square" rtlCol="0" anchor="t">
+            <a:normAutofit/>
+          </a:bodyPr>
           <a:lstStyle/>
           <a:p>
             <a:pPr indent="0" marL="0">
@@ -6349,7 +6593,9 @@
           </a:ln>
         </p:spPr>
         <p:txBody>
-          <a:bodyPr/>
+          <a:bodyPr wrap="square">
+            <a:normAutofit/>
+          </a:bodyPr>
           <a:p/>
         </p:txBody>
       </p:sp>
@@ -6371,7 +6617,9 @@
           <a:ln/>
         </p:spPr>
         <p:txBody>
-          <a:bodyPr wrap="square" rtlCol="0" anchor="ctr"/>
+          <a:bodyPr wrap="square" rtlCol="0" anchor="ctr">
+            <a:normAutofit/>
+          </a:bodyPr>
           <a:lstStyle/>
           <a:p>
             <a:pPr indent="0" marL="0">
@@ -6410,7 +6658,9 @@
           <a:ln/>
         </p:spPr>
         <p:txBody>
-          <a:bodyPr wrap="square" rtlCol="0" anchor="t"/>
+          <a:bodyPr wrap="square" rtlCol="0" anchor="t">
+            <a:normAutofit/>
+          </a:bodyPr>
           <a:lstStyle/>
           <a:p>
             <a:pPr indent="0" marL="0">
@@ -6449,7 +6699,9 @@
           <a:ln/>
         </p:spPr>
         <p:txBody>
-          <a:bodyPr wrap="square" rtlCol="0" anchor="t"/>
+          <a:bodyPr wrap="square" rtlCol="0" anchor="t">
+            <a:normAutofit/>
+          </a:bodyPr>
           <a:lstStyle/>
           <a:p>
             <a:pPr indent="0" marL="0">
@@ -6488,7 +6740,9 @@
           <a:ln/>
         </p:spPr>
         <p:txBody>
-          <a:bodyPr wrap="square" rtlCol="0" anchor="t"/>
+          <a:bodyPr wrap="square" rtlCol="0" anchor="t">
+            <a:normAutofit/>
+          </a:bodyPr>
           <a:lstStyle/>
           <a:p>
             <a:pPr indent="0" marL="0">
@@ -6527,7 +6781,9 @@
           <a:ln/>
         </p:spPr>
         <p:txBody>
-          <a:bodyPr wrap="square" rtlCol="0" anchor="ctr"/>
+          <a:bodyPr wrap="square" rtlCol="0" anchor="ctr">
+            <a:normAutofit/>
+          </a:bodyPr>
           <a:lstStyle/>
           <a:p>
             <a:pPr algn="r" indent="0" marL="0">
@@ -6598,7 +6854,9 @@
           </a:ln>
         </p:spPr>
         <p:txBody>
-          <a:bodyPr/>
+          <a:bodyPr wrap="square">
+            <a:normAutofit/>
+          </a:bodyPr>
           <a:p/>
         </p:txBody>
       </p:sp>
@@ -6627,7 +6885,9 @@
           </a:ln>
         </p:spPr>
         <p:txBody>
-          <a:bodyPr/>
+          <a:bodyPr wrap="square">
+            <a:normAutofit/>
+          </a:bodyPr>
           <a:p/>
         </p:txBody>
       </p:sp>
@@ -6649,7 +6909,9 @@
           <a:ln/>
         </p:spPr>
         <p:txBody>
-          <a:bodyPr wrap="square" rtlCol="0" anchor="ctr"/>
+          <a:bodyPr wrap="square" rtlCol="0" anchor="ctr">
+            <a:normAutofit/>
+          </a:bodyPr>
           <a:lstStyle/>
           <a:p>
             <a:pPr indent="0" marL="0">
@@ -6688,7 +6950,9 @@
           <a:ln/>
         </p:spPr>
         <p:txBody>
-          <a:bodyPr wrap="square" rtlCol="0" anchor="ctr"/>
+          <a:bodyPr wrap="square" rtlCol="0" anchor="ctr">
+            <a:normAutofit/>
+          </a:bodyPr>
           <a:lstStyle/>
           <a:p>
             <a:pPr algn="ctr" indent="0" marL="0">
@@ -6727,7 +6991,9 @@
           <a:ln/>
         </p:spPr>
         <p:txBody>
-          <a:bodyPr wrap="square" rtlCol="0" anchor="ctr"/>
+          <a:bodyPr wrap="square" rtlCol="0" anchor="ctr">
+            <a:normAutofit/>
+          </a:bodyPr>
           <a:lstStyle/>
           <a:p>
             <a:pPr algn="ctr" indent="0" marL="0">
@@ -6775,7 +7041,9 @@
           </a:ln>
         </p:spPr>
         <p:txBody>
-          <a:bodyPr/>
+          <a:bodyPr wrap="square">
+            <a:normAutofit/>
+          </a:bodyPr>
           <a:p/>
         </p:txBody>
       </p:sp>
@@ -6804,7 +7072,9 @@
           </a:ln>
         </p:spPr>
         <p:txBody>
-          <a:bodyPr/>
+          <a:bodyPr wrap="square">
+            <a:normAutofit/>
+          </a:bodyPr>
           <a:p/>
         </p:txBody>
       </p:sp>
@@ -6826,7 +7096,9 @@
           <a:ln/>
         </p:spPr>
         <p:txBody>
-          <a:bodyPr wrap="square" rtlCol="0" anchor="ctr"/>
+          <a:bodyPr wrap="square" rtlCol="0" anchor="ctr">
+            <a:normAutofit/>
+          </a:bodyPr>
           <a:lstStyle/>
           <a:p>
             <a:pPr algn="ctr" indent="0" marL="0">
@@ -6865,7 +7137,9 @@
           <a:ln/>
         </p:spPr>
         <p:txBody>
-          <a:bodyPr wrap="square" rtlCol="0" anchor="ctr"/>
+          <a:bodyPr wrap="square" rtlCol="0" anchor="ctr">
+            <a:normAutofit/>
+          </a:bodyPr>
           <a:lstStyle/>
           <a:p>
             <a:pPr indent="0" marL="0">
@@ -6904,7 +7178,9 @@
           <a:ln/>
         </p:spPr>
         <p:txBody>
-          <a:bodyPr wrap="square" rtlCol="0" anchor="ctr"/>
+          <a:bodyPr wrap="square" rtlCol="0" anchor="ctr">
+            <a:normAutofit/>
+          </a:bodyPr>
           <a:lstStyle/>
           <a:p>
             <a:pPr indent="0" marL="0">
@@ -6952,7 +7228,9 @@
           </a:ln>
         </p:spPr>
         <p:txBody>
-          <a:bodyPr/>
+          <a:bodyPr wrap="square">
+            <a:normAutofit/>
+          </a:bodyPr>
           <a:p/>
         </p:txBody>
       </p:sp>
@@ -6981,7 +7259,9 @@
           </a:ln>
         </p:spPr>
         <p:txBody>
-          <a:bodyPr/>
+          <a:bodyPr wrap="square">
+            <a:normAutofit/>
+          </a:bodyPr>
           <a:p/>
         </p:txBody>
       </p:sp>
@@ -7003,7 +7283,9 @@
           <a:ln/>
         </p:spPr>
         <p:txBody>
-          <a:bodyPr wrap="square" rtlCol="0" anchor="ctr"/>
+          <a:bodyPr wrap="square" rtlCol="0" anchor="ctr">
+            <a:normAutofit/>
+          </a:bodyPr>
           <a:lstStyle/>
           <a:p>
             <a:pPr algn="ctr" indent="0" marL="0">
@@ -7042,7 +7324,9 @@
           <a:ln/>
         </p:spPr>
         <p:txBody>
-          <a:bodyPr wrap="square" rtlCol="0" anchor="ctr"/>
+          <a:bodyPr wrap="square" rtlCol="0" anchor="ctr">
+            <a:normAutofit/>
+          </a:bodyPr>
           <a:lstStyle/>
           <a:p>
             <a:pPr indent="0" marL="0">
@@ -7081,7 +7365,9 @@
           <a:ln/>
         </p:spPr>
         <p:txBody>
-          <a:bodyPr wrap="square" rtlCol="0" anchor="ctr"/>
+          <a:bodyPr wrap="square" rtlCol="0" anchor="ctr">
+            <a:normAutofit/>
+          </a:bodyPr>
           <a:lstStyle/>
           <a:p>
             <a:pPr indent="0" marL="0">
@@ -7129,7 +7415,9 @@
           </a:ln>
         </p:spPr>
         <p:txBody>
-          <a:bodyPr/>
+          <a:bodyPr wrap="square">
+            <a:normAutofit/>
+          </a:bodyPr>
           <a:p/>
         </p:txBody>
       </p:sp>
@@ -7158,7 +7446,9 @@
           </a:ln>
         </p:spPr>
         <p:txBody>
-          <a:bodyPr/>
+          <a:bodyPr wrap="square">
+            <a:normAutofit/>
+          </a:bodyPr>
           <a:p/>
         </p:txBody>
       </p:sp>
@@ -7180,7 +7470,9 @@
           <a:ln/>
         </p:spPr>
         <p:txBody>
-          <a:bodyPr wrap="square" rtlCol="0" anchor="ctr"/>
+          <a:bodyPr wrap="square" rtlCol="0" anchor="ctr">
+            <a:normAutofit/>
+          </a:bodyPr>
           <a:lstStyle/>
           <a:p>
             <a:pPr algn="ctr" indent="0" marL="0">
@@ -7219,7 +7511,9 @@
           <a:ln/>
         </p:spPr>
         <p:txBody>
-          <a:bodyPr wrap="square" rtlCol="0" anchor="ctr"/>
+          <a:bodyPr wrap="square" rtlCol="0" anchor="ctr">
+            <a:normAutofit/>
+          </a:bodyPr>
           <a:lstStyle/>
           <a:p>
             <a:pPr indent="0" marL="0">
@@ -7258,7 +7552,9 @@
           <a:ln/>
         </p:spPr>
         <p:txBody>
-          <a:bodyPr wrap="square" rtlCol="0" anchor="ctr"/>
+          <a:bodyPr wrap="square" rtlCol="0" anchor="ctr">
+            <a:normAutofit/>
+          </a:bodyPr>
           <a:lstStyle/>
           <a:p>
             <a:pPr indent="0" marL="0">
@@ -7297,7 +7593,9 @@
           <a:ln/>
         </p:spPr>
         <p:txBody>
-          <a:bodyPr wrap="square" rtlCol="0" anchor="ctr"/>
+          <a:bodyPr wrap="square" rtlCol="0" anchor="ctr">
+            <a:normAutofit/>
+          </a:bodyPr>
           <a:lstStyle/>
           <a:p>
             <a:pPr algn="r" indent="0" marL="0">

--- a/pptx_sessions_8_22/第9回_応用編_受講者用.pptx
+++ b/pptx_sessions_8_22/第9回_応用編_受講者用.pptx
@@ -1957,7 +1957,7 @@
               <a:buNone/>
             </a:pPr>
             <a:r>
-              <a:rPr lang="en-US" sz="2000" dirty="0">
+              <a:rPr lang="en-US" sz="1400" dirty="0">
                 <a:solidFill>
                   <a:srgbClr val="555555"/>
                 </a:solidFill>
@@ -2448,7 +2448,7 @@
         <p:spPr>
           <a:xfrm>
             <a:off x="11338560" y="6565392"/>
-            <a:ext cx="640080" cy="274320"/>
+            <a:ext cx="640080" cy="329184"/>
           </a:xfrm>
           <a:prstGeom prst="rect">
             <a:avLst/>
@@ -2466,7 +2466,7 @@
               <a:buNone/>
             </a:pPr>
             <a:r>
-              <a:rPr lang="en-US" sz="1400" dirty="0">
+              <a:rPr lang="en-US" sz="1100" dirty="0">
                 <a:solidFill>
                   <a:srgbClr val="888888"/>
                 </a:solidFill>
@@ -3583,7 +3583,7 @@
         <p:spPr>
           <a:xfrm>
             <a:off x="11338560" y="6565392"/>
-            <a:ext cx="640080" cy="274320"/>
+            <a:ext cx="640080" cy="329184"/>
           </a:xfrm>
           <a:prstGeom prst="rect">
             <a:avLst/>
@@ -3601,7 +3601,7 @@
               <a:buNone/>
             </a:pPr>
             <a:r>
-              <a:rPr lang="en-US" sz="1400" dirty="0">
+              <a:rPr lang="en-US" sz="1100" dirty="0">
                 <a:solidFill>
                   <a:srgbClr val="888888"/>
                 </a:solidFill>
@@ -3844,7 +3844,7 @@
               <a:buNone/>
             </a:pPr>
             <a:r>
-              <a:rPr lang="en-US" sz="2000" dirty="0">
+              <a:rPr lang="en-US" sz="1400" dirty="0">
                 <a:solidFill>
                   <a:srgbClr val="555555"/>
                 </a:solidFill>
@@ -3959,7 +3959,7 @@
               <a:buNone/>
             </a:pPr>
             <a:r>
-              <a:rPr lang="en-US" sz="2000" dirty="0">
+              <a:rPr lang="en-US" sz="1600" dirty="0">
                 <a:solidFill>
                   <a:srgbClr val="222222"/>
                 </a:solidFill>
@@ -3976,7 +3976,7 @@
               <a:buNone/>
             </a:pPr>
             <a:r>
-              <a:rPr lang="en-US" sz="2000" dirty="0">
+              <a:rPr lang="en-US" sz="1600" dirty="0">
                 <a:solidFill>
                   <a:srgbClr val="222222"/>
                 </a:solidFill>
@@ -3993,7 +3993,7 @@
               <a:buNone/>
             </a:pPr>
             <a:r>
-              <a:rPr lang="en-US" sz="2000" dirty="0">
+              <a:rPr lang="en-US" sz="1600" dirty="0">
                 <a:solidFill>
                   <a:srgbClr val="222222"/>
                 </a:solidFill>
@@ -4010,7 +4010,7 @@
               <a:buNone/>
             </a:pPr>
             <a:r>
-              <a:rPr lang="en-US" sz="2000" dirty="0">
+              <a:rPr lang="en-US" sz="1600" dirty="0">
                 <a:solidFill>
                   <a:srgbClr val="222222"/>
                 </a:solidFill>
@@ -4027,7 +4027,7 @@
               <a:buNone/>
             </a:pPr>
             <a:r>
-              <a:rPr lang="en-US" sz="2000" dirty="0">
+              <a:rPr lang="en-US" sz="1600" dirty="0">
                 <a:solidFill>
                   <a:srgbClr val="222222"/>
                 </a:solidFill>
@@ -4044,7 +4044,7 @@
               <a:buNone/>
             </a:pPr>
             <a:r>
-              <a:rPr lang="en-US" sz="2000" dirty="0">
+              <a:rPr lang="en-US" sz="1600" dirty="0">
                 <a:solidFill>
                   <a:srgbClr val="222222"/>
                 </a:solidFill>
@@ -4061,7 +4061,7 @@
               <a:buNone/>
             </a:pPr>
             <a:r>
-              <a:rPr lang="en-US" sz="2000" dirty="0">
+              <a:rPr lang="en-US" sz="1600" dirty="0">
                 <a:solidFill>
                   <a:srgbClr val="222222"/>
                 </a:solidFill>
@@ -4078,7 +4078,7 @@
               <a:buNone/>
             </a:pPr>
             <a:r>
-              <a:rPr lang="en-US" sz="2000" dirty="0">
+              <a:rPr lang="en-US" sz="1600" dirty="0">
                 <a:solidFill>
                   <a:srgbClr val="222222"/>
                 </a:solidFill>
@@ -4095,7 +4095,7 @@
               <a:buNone/>
             </a:pPr>
             <a:r>
-              <a:rPr lang="en-US" sz="2000" dirty="0">
+              <a:rPr lang="en-US" sz="1600" dirty="0">
                 <a:solidFill>
                   <a:srgbClr val="222222"/>
                 </a:solidFill>
@@ -4369,7 +4369,7 @@
         <p:spPr>
           <a:xfrm>
             <a:off x="11338560" y="6565392"/>
-            <a:ext cx="640080" cy="274320"/>
+            <a:ext cx="640080" cy="329184"/>
           </a:xfrm>
           <a:prstGeom prst="rect">
             <a:avLst/>
@@ -4387,7 +4387,7 @@
               <a:buNone/>
             </a:pPr>
             <a:r>
-              <a:rPr lang="en-US" sz="1400" dirty="0">
+              <a:rPr lang="en-US" sz="1100" dirty="0">
                 <a:solidFill>
                   <a:srgbClr val="888888"/>
                 </a:solidFill>
@@ -4630,7 +4630,7 @@
               <a:buNone/>
             </a:pPr>
             <a:r>
-              <a:rPr lang="en-US" sz="2000" dirty="0">
+              <a:rPr lang="en-US" sz="1400" dirty="0">
                 <a:solidFill>
                   <a:srgbClr val="222222"/>
                 </a:solidFill>
@@ -4786,7 +4786,7 @@
               <a:buNone/>
             </a:pPr>
             <a:r>
-              <a:rPr lang="en-US" sz="2000" dirty="0">
+              <a:rPr lang="en-US" sz="1400" dirty="0">
                 <a:solidFill>
                   <a:srgbClr val="222222"/>
                 </a:solidFill>
@@ -4868,7 +4868,7 @@
               <a:buNone/>
             </a:pPr>
             <a:r>
-              <a:rPr lang="en-US" sz="2000" dirty="0">
+              <a:rPr lang="en-US" sz="1400" dirty="0">
                 <a:solidFill>
                   <a:srgbClr val="222222"/>
                 </a:solidFill>
@@ -4950,7 +4950,7 @@
               <a:buNone/>
             </a:pPr>
             <a:r>
-              <a:rPr lang="en-US" sz="2000" dirty="0">
+              <a:rPr lang="en-US" sz="1400" dirty="0">
                 <a:solidFill>
                   <a:srgbClr val="222222"/>
                 </a:solidFill>
@@ -5046,8 +5046,8 @@
         </p:nvSpPr>
         <p:spPr>
           <a:xfrm>
-            <a:off x="731520" y="5852160"/>
-            <a:ext cx="10881360" cy="213360"/>
+            <a:off x="731520" y="5669280"/>
+            <a:ext cx="10881360" cy="310896"/>
           </a:xfrm>
           <a:prstGeom prst="rect">
             <a:avLst/>
@@ -5065,7 +5065,7 @@
               <a:buNone/>
             </a:pPr>
             <a:r>
-              <a:rPr lang="en-US" sz="2000" dirty="0">
+              <a:rPr lang="en-US" sz="1100" dirty="0">
                 <a:solidFill>
                   <a:srgbClr val="222222"/>
                 </a:solidFill>
@@ -5087,8 +5087,8 @@
         </p:nvSpPr>
         <p:spPr>
           <a:xfrm>
-            <a:off x="731520" y="6065520"/>
-            <a:ext cx="10881360" cy="213360"/>
+            <a:off x="731520" y="6007608"/>
+            <a:ext cx="10881360" cy="310896"/>
           </a:xfrm>
           <a:prstGeom prst="rect">
             <a:avLst/>
@@ -5106,7 +5106,7 @@
               <a:buNone/>
             </a:pPr>
             <a:r>
-              <a:rPr lang="en-US" sz="2000" dirty="0">
+              <a:rPr lang="en-US" sz="1100" dirty="0">
                 <a:solidFill>
                   <a:srgbClr val="222222"/>
                 </a:solidFill>
@@ -5128,8 +5128,8 @@
         </p:nvSpPr>
         <p:spPr>
           <a:xfrm>
-            <a:off x="731520" y="6278880"/>
-            <a:ext cx="10881360" cy="213360"/>
+            <a:off x="731520" y="6345936"/>
+            <a:ext cx="10881360" cy="310896"/>
           </a:xfrm>
           <a:prstGeom prst="rect">
             <a:avLst/>
@@ -5147,7 +5147,7 @@
               <a:buNone/>
             </a:pPr>
             <a:r>
-              <a:rPr lang="en-US" sz="2000" dirty="0">
+              <a:rPr lang="en-US" sz="1100" dirty="0">
                 <a:solidFill>
                   <a:srgbClr val="222222"/>
                 </a:solidFill>
@@ -5170,7 +5170,7 @@
         <p:spPr>
           <a:xfrm>
             <a:off x="11338560" y="6565392"/>
-            <a:ext cx="640080" cy="274320"/>
+            <a:ext cx="640080" cy="329184"/>
           </a:xfrm>
           <a:prstGeom prst="rect">
             <a:avLst/>
@@ -5188,7 +5188,7 @@
               <a:buNone/>
             </a:pPr>
             <a:r>
-              <a:rPr lang="en-US" sz="1400" dirty="0">
+              <a:rPr lang="en-US" sz="1100" dirty="0">
                 <a:solidFill>
                   <a:srgbClr val="888888"/>
                 </a:solidFill>
@@ -5431,7 +5431,7 @@
               <a:buNone/>
             </a:pPr>
             <a:r>
-              <a:rPr lang="en-US" sz="2000" dirty="0">
+              <a:rPr lang="en-US" sz="1400" dirty="0">
                 <a:solidFill>
                   <a:srgbClr val="222222"/>
                 </a:solidFill>
@@ -5751,7 +5751,7 @@
               <a:buNone/>
             </a:pPr>
             <a:r>
-              <a:rPr lang="en-US" sz="2000" dirty="0">
+              <a:rPr lang="en-US" sz="1400" dirty="0">
                 <a:solidFill>
                   <a:srgbClr val="222222"/>
                 </a:solidFill>
@@ -5847,8 +5847,8 @@
         </p:nvSpPr>
         <p:spPr>
           <a:xfrm>
-            <a:off x="731520" y="5852160"/>
-            <a:ext cx="10881360" cy="213360"/>
+            <a:off x="731520" y="5669280"/>
+            <a:ext cx="10881360" cy="310896"/>
           </a:xfrm>
           <a:prstGeom prst="rect">
             <a:avLst/>
@@ -5866,7 +5866,7 @@
               <a:buNone/>
             </a:pPr>
             <a:r>
-              <a:rPr lang="en-US" sz="2000" dirty="0">
+              <a:rPr lang="en-US" sz="1100" dirty="0">
                 <a:solidFill>
                   <a:srgbClr val="222222"/>
                 </a:solidFill>
@@ -5888,8 +5888,8 @@
         </p:nvSpPr>
         <p:spPr>
           <a:xfrm>
-            <a:off x="731520" y="6065520"/>
-            <a:ext cx="10881360" cy="213360"/>
+            <a:off x="731520" y="6007608"/>
+            <a:ext cx="10881360" cy="310896"/>
           </a:xfrm>
           <a:prstGeom prst="rect">
             <a:avLst/>
@@ -5907,7 +5907,7 @@
               <a:buNone/>
             </a:pPr>
             <a:r>
-              <a:rPr lang="en-US" sz="2000" dirty="0">
+              <a:rPr lang="en-US" sz="1100" dirty="0">
                 <a:solidFill>
                   <a:srgbClr val="222222"/>
                 </a:solidFill>
@@ -5929,8 +5929,8 @@
         </p:nvSpPr>
         <p:spPr>
           <a:xfrm>
-            <a:off x="731520" y="6278880"/>
-            <a:ext cx="10881360" cy="213360"/>
+            <a:off x="731520" y="6345936"/>
+            <a:ext cx="10881360" cy="310896"/>
           </a:xfrm>
           <a:prstGeom prst="rect">
             <a:avLst/>
@@ -5948,7 +5948,7 @@
               <a:buNone/>
             </a:pPr>
             <a:r>
-              <a:rPr lang="en-US" sz="2000" dirty="0">
+              <a:rPr lang="en-US" sz="1100" dirty="0">
                 <a:solidFill>
                   <a:srgbClr val="222222"/>
                 </a:solidFill>
@@ -5971,7 +5971,7 @@
         <p:spPr>
           <a:xfrm>
             <a:off x="11338560" y="6565392"/>
-            <a:ext cx="640080" cy="274320"/>
+            <a:ext cx="640080" cy="329184"/>
           </a:xfrm>
           <a:prstGeom prst="rect">
             <a:avLst/>
@@ -5989,7 +5989,7 @@
               <a:buNone/>
             </a:pPr>
             <a:r>
-              <a:rPr lang="en-US" sz="1400" dirty="0">
+              <a:rPr lang="en-US" sz="1100" dirty="0">
                 <a:solidFill>
                   <a:srgbClr val="888888"/>
                 </a:solidFill>
@@ -6552,7 +6552,7 @@
               <a:buNone/>
             </a:pPr>
             <a:r>
-              <a:rPr lang="en-US" sz="2000" dirty="0">
+              <a:rPr lang="en-US" sz="1400" dirty="0">
                 <a:solidFill>
                   <a:srgbClr val="222222"/>
                 </a:solidFill>
@@ -6648,8 +6648,8 @@
         </p:nvSpPr>
         <p:spPr>
           <a:xfrm>
-            <a:off x="731520" y="5852160"/>
-            <a:ext cx="10881360" cy="213360"/>
+            <a:off x="731520" y="5669280"/>
+            <a:ext cx="10881360" cy="310896"/>
           </a:xfrm>
           <a:prstGeom prst="rect">
             <a:avLst/>
@@ -6667,7 +6667,7 @@
               <a:buNone/>
             </a:pPr>
             <a:r>
-              <a:rPr lang="en-US" sz="2000" dirty="0">
+              <a:rPr lang="en-US" sz="1100" dirty="0">
                 <a:solidFill>
                   <a:srgbClr val="222222"/>
                 </a:solidFill>
@@ -6689,8 +6689,8 @@
         </p:nvSpPr>
         <p:spPr>
           <a:xfrm>
-            <a:off x="731520" y="6065520"/>
-            <a:ext cx="10881360" cy="213360"/>
+            <a:off x="731520" y="6007608"/>
+            <a:ext cx="10881360" cy="310896"/>
           </a:xfrm>
           <a:prstGeom prst="rect">
             <a:avLst/>
@@ -6708,7 +6708,7 @@
               <a:buNone/>
             </a:pPr>
             <a:r>
-              <a:rPr lang="en-US" sz="2000" dirty="0">
+              <a:rPr lang="en-US" sz="1100" dirty="0">
                 <a:solidFill>
                   <a:srgbClr val="222222"/>
                 </a:solidFill>
@@ -6730,8 +6730,8 @@
         </p:nvSpPr>
         <p:spPr>
           <a:xfrm>
-            <a:off x="731520" y="6278880"/>
-            <a:ext cx="10881360" cy="213360"/>
+            <a:off x="731520" y="6345936"/>
+            <a:ext cx="10881360" cy="310896"/>
           </a:xfrm>
           <a:prstGeom prst="rect">
             <a:avLst/>
@@ -6749,7 +6749,7 @@
               <a:buNone/>
             </a:pPr>
             <a:r>
-              <a:rPr lang="en-US" sz="2000" dirty="0">
+              <a:rPr lang="en-US" sz="1100" dirty="0">
                 <a:solidFill>
                   <a:srgbClr val="222222"/>
                 </a:solidFill>
@@ -6772,7 +6772,7 @@
         <p:spPr>
           <a:xfrm>
             <a:off x="11338560" y="6565392"/>
-            <a:ext cx="640080" cy="274320"/>
+            <a:ext cx="640080" cy="329184"/>
           </a:xfrm>
           <a:prstGeom prst="rect">
             <a:avLst/>
@@ -6790,7 +6790,7 @@
               <a:buNone/>
             </a:pPr>
             <a:r>
-              <a:rPr lang="en-US" sz="1400" dirty="0">
+              <a:rPr lang="en-US" sz="1100" dirty="0">
                 <a:solidFill>
                   <a:srgbClr val="888888"/>
                 </a:solidFill>
@@ -6959,7 +6959,7 @@
               <a:buNone/>
             </a:pPr>
             <a:r>
-              <a:rPr lang="en-US" sz="2000" dirty="0">
+              <a:rPr lang="en-US" sz="1400" dirty="0">
                 <a:solidFill>
                   <a:srgbClr val="222222"/>
                 </a:solidFill>
@@ -7584,7 +7584,7 @@
         <p:spPr>
           <a:xfrm>
             <a:off x="11338560" y="6565392"/>
-            <a:ext cx="640080" cy="274320"/>
+            <a:ext cx="640080" cy="329184"/>
           </a:xfrm>
           <a:prstGeom prst="rect">
             <a:avLst/>
@@ -7602,7 +7602,7 @@
               <a:buNone/>
             </a:pPr>
             <a:r>
-              <a:rPr lang="en-US" sz="1400" dirty="0">
+              <a:rPr lang="en-US" sz="1100" dirty="0">
                 <a:solidFill>
                   <a:srgbClr val="888888"/>
                 </a:solidFill>
